--- a/CDC_platform_pipeline_benchmark.pptx
+++ b/CDC_platform_pipeline_benchmark.pptx
@@ -2709,7 +2709,7 @@
               <a:rPr lang="en-US" sz="2800" b="1" dirty="0">
                 <a:latin typeface="Georgia" pitchFamily="34" charset="0"/>
                 <a:ea typeface="Georgia" pitchFamily="34" charset="-122"/>
-                <a:cs typeface="Georgia" pitchFamily="34" charset="-120"/>
+                <a:cs typeface="Times New Roman" panose="02020603050405020304" pitchFamily="18" charset="0"/>
               </a:rPr>
               <a:t>Benchmarking 7 Pipelines across</a:t>
             </a:r>
@@ -2725,7 +2725,7 @@
               <a:rPr lang="en-US" sz="2800" b="1" dirty="0">
                 <a:latin typeface="Georgia" pitchFamily="34" charset="0"/>
                 <a:ea typeface="Georgia" pitchFamily="34" charset="-122"/>
-                <a:cs typeface="Georgia" pitchFamily="34" charset="-120"/>
+                <a:cs typeface="Times New Roman" panose="02020603050405020304" pitchFamily="18" charset="0"/>
               </a:rPr>
               <a:t>Illumina &amp; Nanopore Sequencing</a:t>
             </a:r>
@@ -2747,8 +2747,8 @@
         </p:nvSpPr>
         <p:spPr>
           <a:xfrm>
-            <a:off x="2104557" y="3601482"/>
-            <a:ext cx="6945054" cy="457200"/>
+            <a:off x="1618291" y="3601482"/>
+            <a:ext cx="9121378" cy="457200"/>
           </a:xfrm>
           <a:prstGeom prst="rect">
             <a:avLst/>
@@ -2764,14 +2764,17 @@
               <a:buNone/>
             </a:pPr>
             <a:r>
-              <a:rPr lang="en-US" sz="1600" i="1" dirty="0">
-                <a:latin typeface="Calibri" pitchFamily="34" charset="0"/>
+              <a:rPr lang="en-US" sz="2000" b="1" i="1" dirty="0">
+                <a:latin typeface="Times New Roman" panose="02020603050405020304" pitchFamily="18" charset="0"/>
                 <a:ea typeface="Calibri" pitchFamily="34" charset="-122"/>
-                <a:cs typeface="Calibri" pitchFamily="34" charset="-120"/>
+                <a:cs typeface="Times New Roman" panose="02020603050405020304" pitchFamily="18" charset="0"/>
               </a:rPr>
               <a:t>A cross-pipeline, cross-platform comparison on the CDC wastewater-type sample</a:t>
             </a:r>
-            <a:endParaRPr lang="en-US" sz="1600" dirty="0"/>
+            <a:endParaRPr lang="en-US" sz="2000" b="1" dirty="0">
+              <a:latin typeface="Times New Roman" panose="02020603050405020304" pitchFamily="18" charset="0"/>
+              <a:cs typeface="Times New Roman" panose="02020603050405020304" pitchFamily="18" charset="0"/>
+            </a:endParaRPr>
           </a:p>
         </p:txBody>
       </p:sp>
@@ -3392,45 +3395,6 @@
               <a:t>Only 1,208 Flye contigs → 320 species; long-read assembly is small &amp; error-prone.</a:t>
             </a:r>
             <a:endParaRPr lang="en-US" sz="1300" dirty="0"/>
-          </a:p>
-        </p:txBody>
-      </p:sp>
-      <p:sp>
-        <p:nvSpPr>
-          <p:cNvPr id="20" name="Text 18"/>
-          <p:cNvSpPr/>
-          <p:nvPr/>
-        </p:nvSpPr>
-        <p:spPr>
-          <a:xfrm>
-            <a:off x="457200" y="6473952"/>
-            <a:ext cx="8229600" cy="274320"/>
-          </a:xfrm>
-          <a:prstGeom prst="rect">
-            <a:avLst/>
-          </a:prstGeom>
-          <a:noFill/>
-          <a:ln/>
-        </p:spPr>
-        <p:txBody>
-          <a:bodyPr wrap="square" lIns="0" tIns="0" rIns="0" bIns="0" rtlCol="0" anchor="ctr"/>
-          <a:lstStyle/>
-          <a:p>
-            <a:pPr marL="0" indent="0" algn="l">
-              <a:buNone/>
-            </a:pPr>
-            <a:r>
-              <a:rPr lang="en-US" sz="900" dirty="0">
-                <a:solidFill>
-                  <a:srgbClr val="5B6B7A"/>
-                </a:solidFill>
-                <a:latin typeface="Calibri" pitchFamily="34" charset="0"/>
-                <a:ea typeface="Calibri" pitchFamily="34" charset="-122"/>
-                <a:cs typeface="Calibri" pitchFamily="34" charset="-120"/>
-              </a:rPr>
-              <a:t>CDC Metagenomic Benchmark  ·  UGA College of Public Health</a:t>
-            </a:r>
-            <a:endParaRPr lang="en-US" sz="900" dirty="0"/>
           </a:p>
         </p:txBody>
       </p:sp>
@@ -9381,51 +9345,36 @@
           </a:p>
         </p:txBody>
       </p:sp>
-      <p:sp>
-        <p:nvSpPr>
-          <p:cNvPr id="7" name="Text 5"/>
-          <p:cNvSpPr/>
-          <p:nvPr/>
-        </p:nvSpPr>
-        <p:spPr>
-          <a:xfrm>
-            <a:off x="1463040" y="2350008"/>
-            <a:ext cx="10058400" cy="886968"/>
-          </a:xfrm>
-          <a:prstGeom prst="rect">
-            <a:avLst/>
-          </a:prstGeom>
-          <a:noFill/>
-          <a:ln/>
-        </p:spPr>
-        <p:txBody>
-          <a:bodyPr wrap="square" lIns="0" tIns="0" rIns="0" bIns="0" rtlCol="0" anchor="ctr"/>
-          <a:lstStyle/>
-          <a:p>
-            <a:pPr marL="0" indent="0">
-              <a:buNone/>
-            </a:pPr>
-            <a:r>
-              <a:rPr lang="en-US" sz="5400" dirty="0">
-                <a:solidFill>
-                  <a:srgbClr val="FFFF00"/>
-                </a:solidFill>
-                <a:latin typeface="Times New Roman" panose="02020603050405020304" pitchFamily="18" charset="0"/>
-                <a:ea typeface="Calibri" pitchFamily="34" charset="-122"/>
-                <a:cs typeface="Times New Roman" panose="02020603050405020304" pitchFamily="18" charset="0"/>
-              </a:rPr>
-              <a:t>Thanks.</a:t>
-            </a:r>
-            <a:endParaRPr lang="en-US" sz="5400" dirty="0">
-              <a:solidFill>
-                <a:srgbClr val="FFFF00"/>
-              </a:solidFill>
-              <a:latin typeface="Times New Roman" panose="02020603050405020304" pitchFamily="18" charset="0"/>
-              <a:cs typeface="Times New Roman" panose="02020603050405020304" pitchFamily="18" charset="0"/>
-            </a:endParaRPr>
-          </a:p>
-        </p:txBody>
-      </p:sp>
+      <p:pic>
+        <p:nvPicPr>
+          <p:cNvPr id="22" name="Picture 21">
+            <a:extLst>
+              <a:ext uri="{FF2B5EF4-FFF2-40B4-BE49-F238E27FC236}">
+                <a16:creationId xmlns:a16="http://schemas.microsoft.com/office/drawing/2014/main" id="{76F545B6-66AC-4D6D-B314-D922A8DAE8B8}"/>
+              </a:ext>
+            </a:extLst>
+          </p:cNvPr>
+          <p:cNvPicPr>
+            <a:picLocks noChangeAspect="1"/>
+          </p:cNvPicPr>
+          <p:nvPr/>
+        </p:nvPicPr>
+        <p:blipFill>
+          <a:blip r:embed="rId3"/>
+          <a:stretch>
+            <a:fillRect/>
+          </a:stretch>
+        </p:blipFill>
+        <p:spPr>
+          <a:xfrm>
+            <a:off x="6478" y="0"/>
+            <a:ext cx="12185522" cy="6858000"/>
+          </a:xfrm>
+          <a:prstGeom prst="rect">
+            <a:avLst/>
+          </a:prstGeom>
+        </p:spPr>
+      </p:pic>
     </p:spTree>
     <p:extLst>
       <p:ext uri="{BB962C8B-B14F-4D97-AF65-F5344CB8AC3E}">
